--- a/docs/hardware/hardware.pptx
+++ b/docs/hardware/hardware.pptx
@@ -261,7 +261,7 @@
           <a:p>
             <a:fld id="{21CA4E4D-5138-4006-855E-C3C24FF80F01}" type="datetimeFigureOut">
               <a:rPr lang="nl-BE" smtClean="0"/>
-              <a:t>23/06/2026</a:t>
+              <a:t>26/06/2026</a:t>
             </a:fld>
             <a:endParaRPr lang="nl-BE"/>
           </a:p>
@@ -461,7 +461,7 @@
           <a:p>
             <a:fld id="{21CA4E4D-5138-4006-855E-C3C24FF80F01}" type="datetimeFigureOut">
               <a:rPr lang="nl-BE" smtClean="0"/>
-              <a:t>23/06/2026</a:t>
+              <a:t>26/06/2026</a:t>
             </a:fld>
             <a:endParaRPr lang="nl-BE"/>
           </a:p>
@@ -671,7 +671,7 @@
           <a:p>
             <a:fld id="{21CA4E4D-5138-4006-855E-C3C24FF80F01}" type="datetimeFigureOut">
               <a:rPr lang="nl-BE" smtClean="0"/>
-              <a:t>23/06/2026</a:t>
+              <a:t>26/06/2026</a:t>
             </a:fld>
             <a:endParaRPr lang="nl-BE"/>
           </a:p>
@@ -871,7 +871,7 @@
           <a:p>
             <a:fld id="{21CA4E4D-5138-4006-855E-C3C24FF80F01}" type="datetimeFigureOut">
               <a:rPr lang="nl-BE" smtClean="0"/>
-              <a:t>23/06/2026</a:t>
+              <a:t>26/06/2026</a:t>
             </a:fld>
             <a:endParaRPr lang="nl-BE"/>
           </a:p>
@@ -1147,7 +1147,7 @@
           <a:p>
             <a:fld id="{21CA4E4D-5138-4006-855E-C3C24FF80F01}" type="datetimeFigureOut">
               <a:rPr lang="nl-BE" smtClean="0"/>
-              <a:t>23/06/2026</a:t>
+              <a:t>26/06/2026</a:t>
             </a:fld>
             <a:endParaRPr lang="nl-BE"/>
           </a:p>
@@ -1415,7 +1415,7 @@
           <a:p>
             <a:fld id="{21CA4E4D-5138-4006-855E-C3C24FF80F01}" type="datetimeFigureOut">
               <a:rPr lang="nl-BE" smtClean="0"/>
-              <a:t>23/06/2026</a:t>
+              <a:t>26/06/2026</a:t>
             </a:fld>
             <a:endParaRPr lang="nl-BE"/>
           </a:p>
@@ -1830,7 +1830,7 @@
           <a:p>
             <a:fld id="{21CA4E4D-5138-4006-855E-C3C24FF80F01}" type="datetimeFigureOut">
               <a:rPr lang="nl-BE" smtClean="0"/>
-              <a:t>23/06/2026</a:t>
+              <a:t>26/06/2026</a:t>
             </a:fld>
             <a:endParaRPr lang="nl-BE"/>
           </a:p>
@@ -1972,7 +1972,7 @@
           <a:p>
             <a:fld id="{21CA4E4D-5138-4006-855E-C3C24FF80F01}" type="datetimeFigureOut">
               <a:rPr lang="nl-BE" smtClean="0"/>
-              <a:t>23/06/2026</a:t>
+              <a:t>26/06/2026</a:t>
             </a:fld>
             <a:endParaRPr lang="nl-BE"/>
           </a:p>
@@ -2085,7 +2085,7 @@
           <a:p>
             <a:fld id="{21CA4E4D-5138-4006-855E-C3C24FF80F01}" type="datetimeFigureOut">
               <a:rPr lang="nl-BE" smtClean="0"/>
-              <a:t>23/06/2026</a:t>
+              <a:t>26/06/2026</a:t>
             </a:fld>
             <a:endParaRPr lang="nl-BE"/>
           </a:p>
@@ -2398,7 +2398,7 @@
           <a:p>
             <a:fld id="{21CA4E4D-5138-4006-855E-C3C24FF80F01}" type="datetimeFigureOut">
               <a:rPr lang="nl-BE" smtClean="0"/>
-              <a:t>23/06/2026</a:t>
+              <a:t>26/06/2026</a:t>
             </a:fld>
             <a:endParaRPr lang="nl-BE"/>
           </a:p>
@@ -2687,7 +2687,7 @@
           <a:p>
             <a:fld id="{21CA4E4D-5138-4006-855E-C3C24FF80F01}" type="datetimeFigureOut">
               <a:rPr lang="nl-BE" smtClean="0"/>
-              <a:t>23/06/2026</a:t>
+              <a:t>26/06/2026</a:t>
             </a:fld>
             <a:endParaRPr lang="nl-BE"/>
           </a:p>
@@ -2930,7 +2930,7 @@
           <a:p>
             <a:fld id="{21CA4E4D-5138-4006-855E-C3C24FF80F01}" type="datetimeFigureOut">
               <a:rPr lang="nl-BE" smtClean="0"/>
-              <a:t>23/06/2026</a:t>
+              <a:t>26/06/2026</a:t>
             </a:fld>
             <a:endParaRPr lang="nl-BE"/>
           </a:p>
@@ -3782,7 +3782,7 @@
               <a:pPr algn="ctr"/>
               <a:r>
                 <a:rPr lang="en-US" dirty="0"/>
-                <a:t>TMC2209</a:t>
+                <a:t>TMC2208</a:t>
               </a:r>
               <a:endParaRPr lang="nl-BE" dirty="0"/>
             </a:p>
